--- a/~sasano/lecture/pn2/26/P05.pptx
+++ b/~sasano/lecture/pn2/26/P05.pptx
@@ -335,7 +335,7 @@
             <a:fld id="{E2F69B15-461F-3C49-A7CB-81B18F8080C2}" type="datetimeFigureOut">
               <a:rPr lang="ja-JP" altLang="en-US" smtClean="0"/>
               <a:pPr/>
-              <a:t>2025/10/28</a:t>
+              <a:t>2026/9/28</a:t>
             </a:fld>
             <a:endParaRPr lang="ja-JP" altLang="en-US"/>
           </a:p>
@@ -532,7 +532,7 @@
             <a:fld id="{E2F69B15-461F-3C49-A7CB-81B18F8080C2}" type="datetimeFigureOut">
               <a:rPr lang="ja-JP" altLang="en-US" smtClean="0"/>
               <a:pPr/>
-              <a:t>2025/10/28</a:t>
+              <a:t>2026/9/28</a:t>
             </a:fld>
             <a:endParaRPr lang="ja-JP" altLang="en-US"/>
           </a:p>
@@ -739,7 +739,7 @@
             <a:fld id="{E2F69B15-461F-3C49-A7CB-81B18F8080C2}" type="datetimeFigureOut">
               <a:rPr lang="ja-JP" altLang="en-US" smtClean="0"/>
               <a:pPr/>
-              <a:t>2025/10/28</a:t>
+              <a:t>2026/9/28</a:t>
             </a:fld>
             <a:endParaRPr lang="ja-JP" altLang="en-US"/>
           </a:p>
@@ -936,7 +936,7 @@
             <a:fld id="{E2F69B15-461F-3C49-A7CB-81B18F8080C2}" type="datetimeFigureOut">
               <a:rPr lang="ja-JP" altLang="en-US" smtClean="0"/>
               <a:pPr/>
-              <a:t>2025/10/28</a:t>
+              <a:t>2026/9/28</a:t>
             </a:fld>
             <a:endParaRPr lang="ja-JP" altLang="en-US"/>
           </a:p>
@@ -1178,7 +1178,7 @@
             <a:fld id="{E2F69B15-461F-3C49-A7CB-81B18F8080C2}" type="datetimeFigureOut">
               <a:rPr lang="ja-JP" altLang="en-US" smtClean="0"/>
               <a:pPr/>
-              <a:t>2025/10/28</a:t>
+              <a:t>2026/9/28</a:t>
             </a:fld>
             <a:endParaRPr lang="ja-JP" altLang="en-US"/>
           </a:p>
@@ -1524,7 +1524,7 @@
             <a:fld id="{E2F69B15-461F-3C49-A7CB-81B18F8080C2}" type="datetimeFigureOut">
               <a:rPr lang="ja-JP" altLang="en-US" smtClean="0"/>
               <a:pPr/>
-              <a:t>2025/10/28</a:t>
+              <a:t>2026/9/28</a:t>
             </a:fld>
             <a:endParaRPr lang="ja-JP" altLang="en-US"/>
           </a:p>
@@ -2004,7 +2004,7 @@
             <a:fld id="{E2F69B15-461F-3C49-A7CB-81B18F8080C2}" type="datetimeFigureOut">
               <a:rPr lang="ja-JP" altLang="en-US" smtClean="0"/>
               <a:pPr/>
-              <a:t>2025/10/28</a:t>
+              <a:t>2026/9/28</a:t>
             </a:fld>
             <a:endParaRPr lang="ja-JP" altLang="en-US"/>
           </a:p>
@@ -2118,7 +2118,7 @@
             <a:fld id="{E2F69B15-461F-3C49-A7CB-81B18F8080C2}" type="datetimeFigureOut">
               <a:rPr lang="ja-JP" altLang="en-US" smtClean="0"/>
               <a:pPr/>
-              <a:t>2025/10/28</a:t>
+              <a:t>2026/9/28</a:t>
             </a:fld>
             <a:endParaRPr lang="ja-JP" altLang="en-US"/>
           </a:p>
@@ -2210,7 +2210,7 @@
             <a:fld id="{E2F69B15-461F-3C49-A7CB-81B18F8080C2}" type="datetimeFigureOut">
               <a:rPr lang="ja-JP" altLang="en-US" smtClean="0"/>
               <a:pPr/>
-              <a:t>2025/10/28</a:t>
+              <a:t>2026/9/28</a:t>
             </a:fld>
             <a:endParaRPr lang="ja-JP" altLang="en-US"/>
           </a:p>
@@ -2514,7 +2514,7 @@
             <a:fld id="{E2F69B15-461F-3C49-A7CB-81B18F8080C2}" type="datetimeFigureOut">
               <a:rPr lang="ja-JP" altLang="en-US" smtClean="0"/>
               <a:pPr/>
-              <a:t>2025/10/28</a:t>
+              <a:t>2026/9/28</a:t>
             </a:fld>
             <a:endParaRPr lang="ja-JP" altLang="en-US"/>
           </a:p>
@@ -2763,7 +2763,7 @@
             <a:fld id="{E2F69B15-461F-3C49-A7CB-81B18F8080C2}" type="datetimeFigureOut">
               <a:rPr lang="ja-JP" altLang="en-US" smtClean="0"/>
               <a:pPr/>
-              <a:t>2025/10/28</a:t>
+              <a:t>2026/9/28</a:t>
             </a:fld>
             <a:endParaRPr lang="ja-JP" altLang="en-US"/>
           </a:p>
@@ -3003,7 +3003,7 @@
             <a:fld id="{E2F69B15-461F-3C49-A7CB-81B18F8080C2}" type="datetimeFigureOut">
               <a:rPr lang="ja-JP" altLang="en-US" smtClean="0"/>
               <a:pPr/>
-              <a:t>2025/10/28</a:t>
+              <a:t>2026/9/28</a:t>
             </a:fld>
             <a:endParaRPr lang="ja-JP" altLang="en-US"/>
           </a:p>
@@ -3437,8 +3437,8 @@
         </p:nvSpPr>
         <p:spPr>
           <a:xfrm>
-            <a:off x="2400336" y="5359405"/>
-            <a:ext cx="3865161" cy="584776"/>
+            <a:off x="3817627" y="5316374"/>
+            <a:ext cx="1508746" cy="584775"/>
           </a:xfrm>
           <a:prstGeom prst="rect">
             <a:avLst/>
@@ -3451,13 +3451,10 @@
           </a:bodyPr>
           <a:lstStyle/>
           <a:p>
-            <a:r>
-              <a:rPr kumimoji="1" lang="ja-JP" altLang="en-US" sz="3200" dirty="0"/>
-              <a:t>情報工学科</a:t>
-            </a:r>
-            <a:r>
-              <a:rPr lang="ja-JP" altLang="en-US" sz="3200" dirty="0"/>
-              <a:t>　篠埜</a:t>
+            <a:pPr algn="ctr"/>
+            <a:r>
+              <a:rPr lang="ja-JP" altLang="en-US" sz="3200"/>
+              <a:t>篠埜</a:t>
             </a:r>
             <a:r>
               <a:rPr lang="en-US" altLang="ja-JP" sz="3200" dirty="0"/>
